--- a/02 Osnove Informacione Bezbednosti/02 Prezentacije/PPTX/07_Atributi_rizik_i_pregled_pristupa.pptx
+++ b/02 Osnove Informacione Bezbednosti/02 Prezentacije/PPTX/07_Atributi_rizik_i_pregled_pristupa.pptx
@@ -7255,7 +7255,7 @@
                 <a:ea typeface="Aptos"/>
                 <a:cs typeface="Aptos"/>
               </a:rPr>
-              <a:t>Политика комбинује улогу са поузданим атрибутима контекста и стања ресурса.</a:t>
+              <a:t>Политика проверава атрибуте контекста редом, кроз мала правила са једним разлогом одбијања.</a:t>
             </a:r>
           </a:p>
         </p:txBody>
@@ -7277,7 +7277,7 @@
         <p:spPr>
           <a:xfrm xmlns:a="http://schemas.openxmlformats.org/drawingml/2006/main">
             <a:off x="666750" y="2095500"/>
-            <a:ext cx="6858000" cy="2076450"/>
+            <a:ext cx="6858000" cy="2482350"/>
           </a:xfrm>
           <a:prstGeom xmlns:a="http://schemas.openxmlformats.org/drawingml/2006/main" prst="roundRect">
             <a:avLst>
@@ -7459,7 +7459,7 @@
           <a:p xmlns:a="http://schemas.openxmlformats.org/drawingml/2006/main">
             <a:pPr algn="r">
               <a:lnSpc>
-                <a:spcPct val="100000"/>
+                <a:spcPts val="1300"/>
               </a:lnSpc>
               <a:buNone/>
               <a:defRPr sz="975" b="0">
@@ -7486,7 +7486,7 @@
           <a:p xmlns:a="http://schemas.openxmlformats.org/drawingml/2006/main">
             <a:pPr algn="r">
               <a:lnSpc>
-                <a:spcPct val="100000"/>
+                <a:spcPts val="1300"/>
               </a:lnSpc>
               <a:buNone/>
               <a:defRPr sz="975" b="0">
@@ -7513,7 +7513,7 @@
           <a:p xmlns:a="http://schemas.openxmlformats.org/drawingml/2006/main">
             <a:pPr algn="r">
               <a:lnSpc>
-                <a:spcPct val="100000"/>
+                <a:spcPts val="1300"/>
               </a:lnSpc>
               <a:buNone/>
               <a:defRPr sz="975" b="0">
@@ -7540,7 +7540,7 @@
           <a:p xmlns:a="http://schemas.openxmlformats.org/drawingml/2006/main">
             <a:pPr algn="r">
               <a:lnSpc>
-                <a:spcPct val="100000"/>
+                <a:spcPts val="1300"/>
               </a:lnSpc>
               <a:buNone/>
               <a:defRPr sz="975" b="0">
@@ -7567,7 +7567,7 @@
           <a:p xmlns:a="http://schemas.openxmlformats.org/drawingml/2006/main">
             <a:pPr algn="r">
               <a:lnSpc>
-                <a:spcPct val="100000"/>
+                <a:spcPts val="1300"/>
               </a:lnSpc>
               <a:buNone/>
               <a:defRPr sz="975" b="0">
@@ -7594,7 +7594,7 @@
           <a:p xmlns:a="http://schemas.openxmlformats.org/drawingml/2006/main">
             <a:pPr algn="r">
               <a:lnSpc>
-                <a:spcPct val="100000"/>
+                <a:spcPts val="1300"/>
               </a:lnSpc>
               <a:buNone/>
               <a:defRPr sz="975" b="0">
@@ -7621,7 +7621,7 @@
           <a:p xmlns:a="http://schemas.openxmlformats.org/drawingml/2006/main">
             <a:pPr algn="r">
               <a:lnSpc>
-                <a:spcPct val="100000"/>
+                <a:spcPts val="1300"/>
               </a:lnSpc>
               <a:buNone/>
               <a:defRPr sz="975" b="0">
@@ -7648,7 +7648,7 @@
           <a:p xmlns:a="http://schemas.openxmlformats.org/drawingml/2006/main">
             <a:pPr algn="r">
               <a:lnSpc>
-                <a:spcPct val="100000"/>
+                <a:spcPts val="1300"/>
               </a:lnSpc>
               <a:buNone/>
               <a:defRPr sz="975" b="0">
@@ -7675,7 +7675,7 @@
           <a:p xmlns:a="http://schemas.openxmlformats.org/drawingml/2006/main">
             <a:pPr algn="r">
               <a:lnSpc>
-                <a:spcPct val="100000"/>
+                <a:spcPts val="1300"/>
               </a:lnSpc>
               <a:buNone/>
               <a:defRPr sz="975" b="0">
@@ -7699,46 +7699,15 @@
               <a:t>9</a:t>
             </a:r>
           </a:p>
-        </p:txBody>
-      </p:sp>
-      <p:sp>
-        <p:nvSpPr>
-          <p:cNvPr id="12" name="Rectangle 11">
-            <a:extLst xmlns:a="http://schemas.openxmlformats.org/drawingml/2006/main">
-              <a:ext uri="{FF2B5EF4-FFF2-40B4-BE49-F238E27FC236}">
-                <a16:creationId xmlns:a16="http://schemas.microsoft.com/office/drawing/2014/main" id="{9D52198B-E2CA-4538-9FA0-3A94EFE4A8FC}"/>
-              </a:ext>
-            </a:extLst>
-          </p:cNvPr>
-          <p:cNvSpPr>
-            <a:spLocks xmlns:a="http://schemas.openxmlformats.org/drawingml/2006/main" noGrp="1"/>
-          </p:cNvSpPr>
-          <p:nvPr/>
-        </p:nvSpPr>
-        <p:spPr>
-          <a:xfrm xmlns:a="http://schemas.openxmlformats.org/drawingml/2006/main">
-            <a:off x="1200150" y="2571750"/>
-            <a:ext cx="6153150" cy="3028950"/>
-          </a:xfrm>
-          <a:prstGeom xmlns:a="http://schemas.openxmlformats.org/drawingml/2006/main" prst="rect">
-            <a:avLst/>
-          </a:prstGeom>
-          <a:noFill xmlns:a="http://schemas.openxmlformats.org/drawingml/2006/main"/>
-          <a:ln xmlns:a="http://schemas.openxmlformats.org/drawingml/2006/main" w="0">
-            <a:noFill/>
-          </a:ln>
-        </p:spPr>
-        <p:txBody>
-          <a:bodyPr xmlns:a="http://schemas.openxmlformats.org/drawingml/2006/main" wrap="square" lIns="0" tIns="0" rIns="0" bIns="0" anchor="t">
-            <a:normAutofit/>
-          </a:bodyPr>
-          <a:lstStyle xmlns:a="http://schemas.openxmlformats.org/drawingml/2006/main"/>
-          <a:p xmlns:a="http://schemas.openxmlformats.org/drawingml/2006/main">
-            <a:pPr>
-              <a:buNone/>
-              <a:defRPr sz="1050">
-                <a:solidFill>
-                  <a:srgbClr val="263044"/>
+          <a:p xmlns:a="http://schemas.openxmlformats.org/drawingml/2006/main">
+            <a:pPr algn="r">
+              <a:lnSpc>
+                <a:spcPts val="1300"/>
+              </a:lnSpc>
+              <a:buNone/>
+              <a:defRPr sz="975" b="0">
+                <a:solidFill>
+                  <a:srgbClr val="8792A6"/>
                 </a:solidFill>
                 <a:latin typeface="Consolas"/>
                 <a:ea typeface="Consolas"/>
@@ -7746,129 +7715,26 @@
               </a:defRPr>
             </a:pPr>
             <a:r>
-              <a:rPr b="1">
-                <a:solidFill>
-                  <a:srgbClr val="0969C3"/>
-                </a:solidFill>
-              </a:rPr>
-              <a:t>public</a:t>
-            </a:r>
-            <a:r>
-              <a:rPr b="0">
-                <a:solidFill>
-                  <a:srgbClr val="263044"/>
-                </a:solidFill>
-              </a:rPr>
-              <a:t> </a:t>
-            </a:r>
-            <a:r>
-              <a:rPr b="0">
-                <a:solidFill>
-                  <a:srgbClr val="7651D4"/>
-                </a:solidFill>
-              </a:rPr>
-              <a:t>Decision</a:t>
-            </a:r>
-            <a:r>
-              <a:rPr b="0">
-                <a:solidFill>
-                  <a:srgbClr val="263044"/>
-                </a:solidFill>
-              </a:rPr>
-              <a:t> </a:t>
-            </a:r>
-            <a:r>
-              <a:rPr b="0">
-                <a:solidFill>
-                  <a:srgbClr val="7651D4"/>
-                </a:solidFill>
-              </a:rPr>
-              <a:t>CanApprove</a:t>
-            </a:r>
-            <a:r>
-              <a:rPr b="0">
-                <a:solidFill>
-                  <a:srgbClr val="263044"/>
-                </a:solidFill>
-              </a:rPr>
-              <a:t>(</a:t>
-            </a:r>
-            <a:r>
-              <a:rPr b="0">
-                <a:solidFill>
-                  <a:srgbClr val="7651D4"/>
-                </a:solidFill>
-              </a:rPr>
-              <a:t>User</a:t>
-            </a:r>
-            <a:r>
-              <a:rPr b="0">
-                <a:solidFill>
-                  <a:srgbClr val="263044"/>
-                </a:solidFill>
-              </a:rPr>
-              <a:t> user, </a:t>
-            </a:r>
-            <a:r>
-              <a:rPr b="0">
-                <a:solidFill>
-                  <a:srgbClr val="7651D4"/>
-                </a:solidFill>
-              </a:rPr>
-              <a:t>Report</a:t>
-            </a:r>
-            <a:r>
-              <a:rPr b="0">
-                <a:solidFill>
-                  <a:srgbClr val="263044"/>
-                </a:solidFill>
-              </a:rPr>
-              <a:t> report, </a:t>
-            </a:r>
-            <a:r>
-              <a:rPr b="0">
-                <a:solidFill>
-                  <a:srgbClr val="7651D4"/>
-                </a:solidFill>
-              </a:rPr>
-              <a:t>Context</a:t>
-            </a:r>
-            <a:r>
-              <a:rPr b="0">
-                <a:solidFill>
-                  <a:srgbClr val="263044"/>
-                </a:solidFill>
-              </a:rPr>
-              <a:t> ctx)</a:t>
-            </a:r>
-          </a:p>
-          <a:p xmlns:a="http://schemas.openxmlformats.org/drawingml/2006/main">
-            <a:pPr>
-              <a:buNone/>
-              <a:defRPr sz="1050">
-                <a:solidFill>
-                  <a:srgbClr val="263044"/>
+              <a:rPr sz="975" b="0">
+                <a:solidFill>
+                  <a:srgbClr val="8792A6"/>
                 </a:solidFill>
                 <a:latin typeface="Consolas"/>
                 <a:ea typeface="Consolas"/>
                 <a:cs typeface="Consolas"/>
-              </a:defRPr>
-            </a:pPr>
-            <a:r>
-              <a:rPr b="0">
-                <a:solidFill>
-                  <a:srgbClr val="263044"/>
-                </a:solidFill>
-              </a:rPr>
-              <a:t>{</a:t>
-            </a:r>
-          </a:p>
-          <a:p xmlns:a="http://schemas.openxmlformats.org/drawingml/2006/main">
-            <a:pPr>
-              <a:buNone/>
-              <a:defRPr sz="1050">
-                <a:solidFill>
-                  <a:srgbClr val="263044"/>
+              </a:rPr>
+              <a:t>10</a:t>
+            </a:r>
+          </a:p>
+          <a:p xmlns:a="http://schemas.openxmlformats.org/drawingml/2006/main">
+            <a:pPr algn="r">
+              <a:lnSpc>
+                <a:spcPts val="1300"/>
+              </a:lnSpc>
+              <a:buNone/>
+              <a:defRPr sz="975" b="0">
+                <a:solidFill>
+                  <a:srgbClr val="8792A6"/>
                 </a:solidFill>
                 <a:latin typeface="Consolas"/>
                 <a:ea typeface="Consolas"/>
@@ -7876,261 +7742,56 @@
               </a:defRPr>
             </a:pPr>
             <a:r>
-              <a:rPr b="0">
-                <a:solidFill>
-                  <a:srgbClr val="263044"/>
-                </a:solidFill>
-              </a:rPr>
-              <a:t>    </a:t>
-            </a:r>
-            <a:r>
-              <a:rPr b="1">
-                <a:solidFill>
-                  <a:srgbClr val="0969C3"/>
-                </a:solidFill>
-              </a:rPr>
-              <a:t>if</a:t>
-            </a:r>
-            <a:r>
-              <a:rPr b="0">
-                <a:solidFill>
-                  <a:srgbClr val="263044"/>
-                </a:solidFill>
-              </a:rPr>
-              <a:t> (!user.</a:t>
-            </a:r>
-            <a:r>
-              <a:rPr b="0">
-                <a:solidFill>
-                  <a:srgbClr val="7651D4"/>
-                </a:solidFill>
-              </a:rPr>
-              <a:t>HasRole</a:t>
-            </a:r>
-            <a:r>
-              <a:rPr b="0">
-                <a:solidFill>
-                  <a:srgbClr val="263044"/>
-                </a:solidFill>
-              </a:rPr>
-              <a:t>(</a:t>
-            </a:r>
-            <a:r>
-              <a:rPr b="0">
-                <a:solidFill>
-                  <a:srgbClr val="B45309"/>
-                </a:solidFill>
-              </a:rPr>
-              <a:t>"operator"</a:t>
-            </a:r>
-            <a:r>
-              <a:rPr b="0">
-                <a:solidFill>
-                  <a:srgbClr val="263044"/>
-                </a:solidFill>
-              </a:rPr>
-              <a:t>)) </a:t>
-            </a:r>
-            <a:r>
-              <a:rPr b="1">
-                <a:solidFill>
-                  <a:srgbClr val="0969C3"/>
-                </a:solidFill>
-              </a:rPr>
-              <a:t>return</a:t>
-            </a:r>
-            <a:r>
-              <a:rPr b="0">
-                <a:solidFill>
-                  <a:srgbClr val="263044"/>
-                </a:solidFill>
-              </a:rPr>
-              <a:t> </a:t>
-            </a:r>
-            <a:r>
-              <a:rPr b="0">
-                <a:solidFill>
-                  <a:srgbClr val="7651D4"/>
-                </a:solidFill>
-              </a:rPr>
-              <a:t>Decision</a:t>
-            </a:r>
-            <a:r>
-              <a:rPr b="0">
-                <a:solidFill>
-                  <a:srgbClr val="263044"/>
-                </a:solidFill>
-              </a:rPr>
-              <a:t>.</a:t>
-            </a:r>
-            <a:r>
-              <a:rPr b="0">
-                <a:solidFill>
-                  <a:srgbClr val="7651D4"/>
-                </a:solidFill>
-              </a:rPr>
-              <a:t>Deny</a:t>
-            </a:r>
-            <a:r>
-              <a:rPr b="0">
-                <a:solidFill>
-                  <a:srgbClr val="263044"/>
-                </a:solidFill>
-              </a:rPr>
-              <a:t>(</a:t>
-            </a:r>
-            <a:r>
-              <a:rPr b="0">
-                <a:solidFill>
-                  <a:srgbClr val="B45309"/>
-                </a:solidFill>
-              </a:rPr>
-              <a:t>"role"</a:t>
-            </a:r>
-            <a:r>
-              <a:rPr b="0">
-                <a:solidFill>
-                  <a:srgbClr val="263044"/>
-                </a:solidFill>
-              </a:rPr>
-              <a:t>);</a:t>
-            </a:r>
-          </a:p>
-          <a:p xmlns:a="http://schemas.openxmlformats.org/drawingml/2006/main">
-            <a:pPr>
-              <a:buNone/>
-              <a:defRPr sz="1050">
-                <a:solidFill>
-                  <a:srgbClr val="263044"/>
+              <a:rPr sz="975" b="0">
+                <a:solidFill>
+                  <a:srgbClr val="8792A6"/>
                 </a:solidFill>
                 <a:latin typeface="Consolas"/>
                 <a:ea typeface="Consolas"/>
                 <a:cs typeface="Consolas"/>
-              </a:defRPr>
-            </a:pPr>
-            <a:r>
-              <a:rPr b="0">
-                <a:solidFill>
-                  <a:srgbClr val="263044"/>
-                </a:solidFill>
-              </a:rPr>
-              <a:t>    </a:t>
-            </a:r>
-            <a:r>
-              <a:rPr b="1">
-                <a:solidFill>
-                  <a:srgbClr val="0969C3"/>
-                </a:solidFill>
-              </a:rPr>
-              <a:t>if</a:t>
-            </a:r>
-            <a:r>
-              <a:rPr b="0">
-                <a:solidFill>
-                  <a:srgbClr val="263044"/>
-                </a:solidFill>
-              </a:rPr>
-              <a:t> (report.</a:t>
-            </a:r>
-            <a:r>
-              <a:rPr b="0">
-                <a:solidFill>
-                  <a:srgbClr val="7651D4"/>
-                </a:solidFill>
-              </a:rPr>
-              <a:t>DomainId</a:t>
-            </a:r>
-            <a:r>
-              <a:rPr b="0">
-                <a:solidFill>
-                  <a:srgbClr val="263044"/>
-                </a:solidFill>
-              </a:rPr>
-              <a:t> != user.</a:t>
-            </a:r>
-            <a:r>
-              <a:rPr b="0">
-                <a:solidFill>
-                  <a:srgbClr val="7651D4"/>
-                </a:solidFill>
-              </a:rPr>
-              <a:t>DomainId</a:t>
-            </a:r>
-            <a:r>
-              <a:rPr b="0">
-                <a:solidFill>
-                  <a:srgbClr val="263044"/>
-                </a:solidFill>
-              </a:rPr>
-              <a:t>) </a:t>
-            </a:r>
-            <a:r>
-              <a:rPr b="1">
-                <a:solidFill>
-                  <a:srgbClr val="0969C3"/>
-                </a:solidFill>
-              </a:rPr>
-              <a:t>return</a:t>
-            </a:r>
-            <a:r>
-              <a:rPr b="0">
-                <a:solidFill>
-                  <a:srgbClr val="263044"/>
-                </a:solidFill>
-              </a:rPr>
-              <a:t> </a:t>
-            </a:r>
-            <a:r>
-              <a:rPr b="0">
-                <a:solidFill>
-                  <a:srgbClr val="7651D4"/>
-                </a:solidFill>
-              </a:rPr>
-              <a:t>Decision</a:t>
-            </a:r>
-            <a:r>
-              <a:rPr b="0">
-                <a:solidFill>
-                  <a:srgbClr val="263044"/>
-                </a:solidFill>
-              </a:rPr>
-              <a:t>.</a:t>
-            </a:r>
-            <a:r>
-              <a:rPr b="0">
-                <a:solidFill>
-                  <a:srgbClr val="7651D4"/>
-                </a:solidFill>
-              </a:rPr>
-              <a:t>Deny</a:t>
-            </a:r>
-            <a:r>
-              <a:rPr b="0">
-                <a:solidFill>
-                  <a:srgbClr val="263044"/>
-                </a:solidFill>
-              </a:rPr>
-              <a:t>(</a:t>
-            </a:r>
-            <a:r>
-              <a:rPr b="0">
-                <a:solidFill>
-                  <a:srgbClr val="B45309"/>
-                </a:solidFill>
-              </a:rPr>
-              <a:t>"domain"</a:t>
-            </a:r>
-            <a:r>
-              <a:rPr b="0">
-                <a:solidFill>
-                  <a:srgbClr val="263044"/>
-                </a:solidFill>
-              </a:rPr>
-              <a:t>);</a:t>
-            </a:r>
-          </a:p>
+              </a:rPr>
+              <a:t>11</a:t>
+            </a:r>
+          </a:p>
+        </p:txBody>
+      </p:sp>
+      <p:sp>
+        <p:nvSpPr>
+          <p:cNvPr id="12" name="Rectangle 11">
+            <a:extLst xmlns:a="http://schemas.openxmlformats.org/drawingml/2006/main">
+              <a:ext uri="{FF2B5EF4-FFF2-40B4-BE49-F238E27FC236}">
+                <a16:creationId xmlns:a16="http://schemas.microsoft.com/office/drawing/2014/main" id="{9D52198B-E2CA-4538-9FA0-3A94EFE4A8FC}"/>
+              </a:ext>
+            </a:extLst>
+          </p:cNvPr>
+          <p:cNvSpPr>
+            <a:spLocks xmlns:a="http://schemas.openxmlformats.org/drawingml/2006/main" noGrp="1"/>
+          </p:cNvSpPr>
+          <p:nvPr/>
+        </p:nvSpPr>
+        <p:spPr>
+          <a:xfrm xmlns:a="http://schemas.openxmlformats.org/drawingml/2006/main">
+            <a:off x="1200150" y="2571750"/>
+            <a:ext cx="6153150" cy="3028950"/>
+          </a:xfrm>
+          <a:prstGeom xmlns:a="http://schemas.openxmlformats.org/drawingml/2006/main" prst="rect">
+            <a:avLst/>
+          </a:prstGeom>
+          <a:noFill xmlns:a="http://schemas.openxmlformats.org/drawingml/2006/main"/>
+          <a:ln xmlns:a="http://schemas.openxmlformats.org/drawingml/2006/main" w="0">
+            <a:noFill/>
+          </a:ln>
+        </p:spPr>
+        <p:txBody>
+          <a:bodyPr xmlns:a="http://schemas.openxmlformats.org/drawingml/2006/main" wrap="square" lIns="0" tIns="0" rIns="0" bIns="0" anchor="t">
+            <a:normAutofit/>
+          </a:bodyPr>
+          <a:lstStyle xmlns:a="http://schemas.openxmlformats.org/drawingml/2006/main"/>
           <a:p xmlns:a="http://schemas.openxmlformats.org/drawingml/2006/main">
             <a:pPr>
+              <a:lnSpc>
+                <a:spcPts val="1300"/>
+              </a:lnSpc>
               <a:buNone/>
               <a:defRPr sz="1050">
                 <a:solidFill>
@@ -8142,28 +7803,36 @@
               </a:defRPr>
             </a:pPr>
             <a:r>
+              <a:rPr b="1">
+                <a:solidFill>
+                  <a:srgbClr val="0969C3"/>
+                </a:solidFill>
+              </a:rPr>
+              <a:t>public</a:t>
+            </a:r>
+            <a:r>
               <a:rPr b="0">
                 <a:solidFill>
                   <a:srgbClr val="263044"/>
                 </a:solidFill>
               </a:rPr>
-              <a:t>    </a:t>
-            </a:r>
-            <a:r>
-              <a:rPr b="1">
-                <a:solidFill>
-                  <a:srgbClr val="0969C3"/>
-                </a:solidFill>
-              </a:rPr>
-              <a:t>if</a:t>
+              <a:t> </a:t>
             </a:r>
             <a:r>
               <a:rPr b="0">
                 <a:solidFill>
+                  <a:srgbClr val="7651D4"/>
+                </a:solidFill>
+              </a:rPr>
+              <a:t>AccessDecision</a:t>
+            </a:r>
+            <a:r>
+              <a:rPr b="0">
+                <a:solidFill>
                   <a:srgbClr val="263044"/>
                 </a:solidFill>
               </a:rPr>
-              <a:t> (!ctx.</a:t>
+              <a:t> </a:t>
             </a:r>
             <a:r>
               <a:rPr b="0">
@@ -8171,7 +7840,7 @@
                   <a:srgbClr val="7651D4"/>
                 </a:solidFill>
               </a:rPr>
-              <a:t>ManagedDevice</a:t>
+              <a:t>Evaluate</a:t>
             </a:r>
             <a:r>
               <a:rPr b="0">
@@ -8179,23 +7848,23 @@
                   <a:srgbClr val="263044"/>
                 </a:solidFill>
               </a:rPr>
-              <a:t>) </a:t>
-            </a:r>
-            <a:r>
-              <a:rPr b="1">
-                <a:solidFill>
-                  <a:srgbClr val="0969C3"/>
-                </a:solidFill>
-              </a:rPr>
-              <a:t>return</a:t>
+              <a:t>(</a:t>
             </a:r>
             <a:r>
               <a:rPr b="0">
                 <a:solidFill>
+                  <a:srgbClr val="7651D4"/>
+                </a:solidFill>
+              </a:rPr>
+              <a:t>AccessContext</a:t>
+            </a:r>
+            <a:r>
+              <a:rPr b="0">
+                <a:solidFill>
                   <a:srgbClr val="263044"/>
                 </a:solidFill>
               </a:rPr>
-              <a:t> </a:t>
+              <a:t> context, </a:t>
             </a:r>
             <a:r>
               <a:rPr b="0">
@@ -8203,7 +7872,7 @@
                   <a:srgbClr val="7651D4"/>
                 </a:solidFill>
               </a:rPr>
-              <a:t>Decision</a:t>
+              <a:t>DateTimeOffset</a:t>
             </a:r>
             <a:r>
               <a:rPr b="0">
@@ -8211,43 +7880,14 @@
                   <a:srgbClr val="263044"/>
                 </a:solidFill>
               </a:rPr>
-              <a:t>.</a:t>
-            </a:r>
-            <a:r>
-              <a:rPr b="0">
-                <a:solidFill>
-                  <a:srgbClr val="7651D4"/>
-                </a:solidFill>
-              </a:rPr>
-              <a:t>Deny</a:t>
-            </a:r>
-            <a:r>
-              <a:rPr b="0">
-                <a:solidFill>
-                  <a:srgbClr val="263044"/>
-                </a:solidFill>
-              </a:rPr>
-              <a:t>(</a:t>
-            </a:r>
-            <a:r>
-              <a:rPr b="0">
-                <a:solidFill>
-                  <a:srgbClr val="B45309"/>
-                </a:solidFill>
-              </a:rPr>
-              <a:t>"device"</a:t>
-            </a:r>
-            <a:r>
-              <a:rPr b="0">
-                <a:solidFill>
-                  <a:srgbClr val="263044"/>
-                </a:solidFill>
-              </a:rPr>
-              <a:t>);</a:t>
+              <a:t> now)</a:t>
             </a:r>
           </a:p>
           <a:p xmlns:a="http://schemas.openxmlformats.org/drawingml/2006/main">
             <a:pPr>
+              <a:lnSpc>
+                <a:spcPts val="1300"/>
+              </a:lnSpc>
               <a:buNone/>
               <a:defRPr sz="1050">
                 <a:solidFill>
@@ -8264,75 +7904,14 @@
                   <a:srgbClr val="263044"/>
                 </a:solidFill>
               </a:rPr>
-              <a:t>    </a:t>
-            </a:r>
-            <a:r>
-              <a:rPr b="1">
-                <a:solidFill>
-                  <a:srgbClr val="0969C3"/>
-                </a:solidFill>
-              </a:rPr>
-              <a:t>if</a:t>
-            </a:r>
-            <a:r>
-              <a:rPr b="0">
-                <a:solidFill>
-                  <a:srgbClr val="263044"/>
-                </a:solidFill>
-              </a:rPr>
-              <a:t> (!ctx.</a:t>
-            </a:r>
-            <a:r>
-              <a:rPr b="0">
-                <a:solidFill>
-                  <a:srgbClr val="7651D4"/>
-                </a:solidFill>
-              </a:rPr>
-              <a:t>ActiveAssignment</a:t>
-            </a:r>
-            <a:r>
-              <a:rPr b="0">
-                <a:solidFill>
-                  <a:srgbClr val="263044"/>
-                </a:solidFill>
-              </a:rPr>
-              <a:t>.</a:t>
-            </a:r>
-            <a:r>
-              <a:rPr b="0">
-                <a:solidFill>
-                  <a:srgbClr val="7651D4"/>
-                </a:solidFill>
-              </a:rPr>
-              <a:t>Contains</a:t>
-            </a:r>
-            <a:r>
-              <a:rPr b="0">
-                <a:solidFill>
-                  <a:srgbClr val="263044"/>
-                </a:solidFill>
-              </a:rPr>
-              <a:t>(report.</a:t>
-            </a:r>
-            <a:r>
-              <a:rPr b="0">
-                <a:solidFill>
-                  <a:srgbClr val="7651D4"/>
-                </a:solidFill>
-              </a:rPr>
-              <a:t>Id</a:t>
-            </a:r>
-            <a:r>
-              <a:rPr b="0">
-                <a:solidFill>
-                  <a:srgbClr val="263044"/>
-                </a:solidFill>
-              </a:rPr>
-              <a:t>))</a:t>
+              <a:t>{</a:t>
             </a:r>
           </a:p>
           <a:p xmlns:a="http://schemas.openxmlformats.org/drawingml/2006/main">
             <a:pPr>
+              <a:lnSpc>
+                <a:spcPts val="1300"/>
+              </a:lnSpc>
               <a:buNone/>
               <a:defRPr sz="1050">
                 <a:solidFill>
@@ -8349,7 +7928,7 @@
                   <a:srgbClr val="263044"/>
                 </a:solidFill>
               </a:rPr>
-              <a:t>        </a:t>
+              <a:t>    </a:t>
             </a:r>
             <a:r>
               <a:rPr b="1">
@@ -8357,7 +7936,7 @@
                   <a:srgbClr val="0969C3"/>
                 </a:solidFill>
               </a:rPr>
-              <a:t>return</a:t>
+              <a:t>var</a:t>
             </a:r>
             <a:r>
               <a:rPr b="0">
@@ -8365,59 +7944,14 @@
                   <a:srgbClr val="263044"/>
                 </a:solidFill>
               </a:rPr>
-              <a:t> </a:t>
-            </a:r>
-            <a:r>
-              <a:rPr b="0">
-                <a:solidFill>
-                  <a:srgbClr val="7651D4"/>
-                </a:solidFill>
-              </a:rPr>
-              <a:t>Decision</a:t>
-            </a:r>
-            <a:r>
-              <a:rPr b="0">
-                <a:solidFill>
-                  <a:srgbClr val="263044"/>
-                </a:solidFill>
-              </a:rPr>
-              <a:t>.</a:t>
-            </a:r>
-            <a:r>
-              <a:rPr b="0">
-                <a:solidFill>
-                  <a:srgbClr val="7651D4"/>
-                </a:solidFill>
-              </a:rPr>
-              <a:t>Deny</a:t>
-            </a:r>
-            <a:r>
-              <a:rPr b="0">
-                <a:solidFill>
-                  <a:srgbClr val="263044"/>
-                </a:solidFill>
-              </a:rPr>
-              <a:t>(</a:t>
-            </a:r>
-            <a:r>
-              <a:rPr b="0">
-                <a:solidFill>
-                  <a:srgbClr val="B45309"/>
-                </a:solidFill>
-              </a:rPr>
-              <a:t>"assignment"</a:t>
-            </a:r>
-            <a:r>
-              <a:rPr b="0">
-                <a:solidFill>
-                  <a:srgbClr val="263044"/>
-                </a:solidFill>
-              </a:rPr>
-              <a:t>);</a:t>
+              <a:t> denial = _rules</a:t>
             </a:r>
           </a:p>
           <a:p xmlns:a="http://schemas.openxmlformats.org/drawingml/2006/main">
             <a:pPr>
+              <a:lnSpc>
+                <a:spcPts val="1300"/>
+              </a:lnSpc>
               <a:buNone/>
               <a:defRPr sz="1050">
                 <a:solidFill>
@@ -8434,6 +7968,174 @@
                   <a:srgbClr val="263044"/>
                 </a:solidFill>
               </a:rPr>
+              <a:t>        .</a:t>
+            </a:r>
+            <a:r>
+              <a:rPr b="0">
+                <a:solidFill>
+                  <a:srgbClr val="7651D4"/>
+                </a:solidFill>
+              </a:rPr>
+              <a:t>Select</a:t>
+            </a:r>
+            <a:r>
+              <a:rPr b="0">
+                <a:solidFill>
+                  <a:srgbClr val="263044"/>
+                </a:solidFill>
+              </a:rPr>
+              <a:t>(rule =&gt; rule.</a:t>
+            </a:r>
+            <a:r>
+              <a:rPr b="0">
+                <a:solidFill>
+                  <a:srgbClr val="7651D4"/>
+                </a:solidFill>
+              </a:rPr>
+              <a:t>Evaluate</a:t>
+            </a:r>
+            <a:r>
+              <a:rPr b="0">
+                <a:solidFill>
+                  <a:srgbClr val="263044"/>
+                </a:solidFill>
+              </a:rPr>
+              <a:t>(context))</a:t>
+            </a:r>
+          </a:p>
+          <a:p xmlns:a="http://schemas.openxmlformats.org/drawingml/2006/main">
+            <a:pPr>
+              <a:lnSpc>
+                <a:spcPts val="1300"/>
+              </a:lnSpc>
+              <a:buNone/>
+              <a:defRPr sz="1050">
+                <a:solidFill>
+                  <a:srgbClr val="263044"/>
+                </a:solidFill>
+                <a:latin typeface="Consolas"/>
+                <a:ea typeface="Consolas"/>
+                <a:cs typeface="Consolas"/>
+              </a:defRPr>
+            </a:pPr>
+            <a:r>
+              <a:rPr b="0">
+                <a:solidFill>
+                  <a:srgbClr val="263044"/>
+                </a:solidFill>
+              </a:rPr>
+              <a:t>        .</a:t>
+            </a:r>
+            <a:r>
+              <a:rPr b="0">
+                <a:solidFill>
+                  <a:srgbClr val="7651D4"/>
+                </a:solidFill>
+              </a:rPr>
+              <a:t>FirstOrDefault</a:t>
+            </a:r>
+            <a:r>
+              <a:rPr b="0">
+                <a:solidFill>
+                  <a:srgbClr val="263044"/>
+                </a:solidFill>
+              </a:rPr>
+              <a:t>(outcome =&gt; outcome </a:t>
+            </a:r>
+            <a:r>
+              <a:rPr b="1">
+                <a:solidFill>
+                  <a:srgbClr val="0969C3"/>
+                </a:solidFill>
+              </a:rPr>
+              <a:t>is</a:t>
+            </a:r>
+            <a:r>
+              <a:rPr b="0">
+                <a:solidFill>
+                  <a:srgbClr val="263044"/>
+                </a:solidFill>
+              </a:rPr>
+              <a:t> </a:t>
+            </a:r>
+            <a:r>
+              <a:rPr b="1">
+                <a:solidFill>
+                  <a:srgbClr val="0969C3"/>
+                </a:solidFill>
+              </a:rPr>
+              <a:t>not</a:t>
+            </a:r>
+            <a:r>
+              <a:rPr b="0">
+                <a:solidFill>
+                  <a:srgbClr val="263044"/>
+                </a:solidFill>
+              </a:rPr>
+              <a:t> </a:t>
+            </a:r>
+            <a:r>
+              <a:rPr b="1">
+                <a:solidFill>
+                  <a:srgbClr val="0969C3"/>
+                </a:solidFill>
+              </a:rPr>
+              <a:t>null</a:t>
+            </a:r>
+            <a:r>
+              <a:rPr b="0">
+                <a:solidFill>
+                  <a:srgbClr val="263044"/>
+                </a:solidFill>
+              </a:rPr>
+              <a:t>);</a:t>
+            </a:r>
+          </a:p>
+          <a:p xmlns:a="http://schemas.openxmlformats.org/drawingml/2006/main">
+            <a:pPr>
+              <a:lnSpc>
+                <a:spcPts val="1300"/>
+              </a:lnSpc>
+              <a:buNone/>
+              <a:defRPr sz="1050">
+                <a:solidFill>
+                  <a:srgbClr val="263044"/>
+                </a:solidFill>
+                <a:latin typeface="Consolas"/>
+                <a:ea typeface="Consolas"/>
+                <a:cs typeface="Consolas"/>
+              </a:defRPr>
+            </a:pPr>
+            <a:r>
+              <a:rPr b="0">
+                <a:solidFill>
+                  <a:srgbClr val="263044"/>
+                </a:solidFill>
+              </a:rPr>
+              <a:t> </a:t>
+            </a:r>
+          </a:p>
+          <a:p xmlns:a="http://schemas.openxmlformats.org/drawingml/2006/main">
+            <a:pPr>
+              <a:lnSpc>
+                <a:spcPts val="1300"/>
+              </a:lnSpc>
+              <a:buNone/>
+              <a:defRPr sz="1050">
+                <a:solidFill>
+                  <a:srgbClr val="263044"/>
+                </a:solidFill>
+                <a:latin typeface="Consolas"/>
+                <a:ea typeface="Consolas"/>
+                <a:cs typeface="Consolas"/>
+              </a:defRPr>
+            </a:pPr>
+            <a:r>
+              <a:rPr b="0">
+                <a:solidFill>
+                  <a:srgbClr val="263044"/>
+                </a:solidFill>
+              </a:rPr>
               <a:t>    </a:t>
             </a:r>
             <a:r>
@@ -8450,15 +8152,95 @@
                   <a:srgbClr val="263044"/>
                 </a:solidFill>
               </a:rPr>
+              <a:t> denial </a:t>
+            </a:r>
+            <a:r>
+              <a:rPr b="1">
+                <a:solidFill>
+                  <a:srgbClr val="0969C3"/>
+                </a:solidFill>
+              </a:rPr>
+              <a:t>is</a:t>
+            </a:r>
+            <a:r>
+              <a:rPr b="0">
+                <a:solidFill>
+                  <a:srgbClr val="263044"/>
+                </a:solidFill>
+              </a:rPr>
               <a:t> </a:t>
             </a:r>
             <a:r>
+              <a:rPr b="1">
+                <a:solidFill>
+                  <a:srgbClr val="0969C3"/>
+                </a:solidFill>
+              </a:rPr>
+              <a:t>null</a:t>
+            </a:r>
+          </a:p>
+          <a:p xmlns:a="http://schemas.openxmlformats.org/drawingml/2006/main">
+            <a:pPr>
+              <a:lnSpc>
+                <a:spcPts val="1300"/>
+              </a:lnSpc>
+              <a:buNone/>
+              <a:defRPr sz="1050">
+                <a:solidFill>
+                  <a:srgbClr val="263044"/>
+                </a:solidFill>
+                <a:latin typeface="Consolas"/>
+                <a:ea typeface="Consolas"/>
+                <a:cs typeface="Consolas"/>
+              </a:defRPr>
+            </a:pPr>
+            <a:r>
               <a:rPr b="0">
                 <a:solidFill>
+                  <a:srgbClr val="263044"/>
+                </a:solidFill>
+              </a:rPr>
+              <a:t>        ? </a:t>
+            </a:r>
+            <a:r>
+              <a:rPr b="1">
+                <a:solidFill>
+                  <a:srgbClr val="0969C3"/>
+                </a:solidFill>
+              </a:rPr>
+              <a:t>new</a:t>
+            </a:r>
+            <a:r>
+              <a:rPr b="0">
+                <a:solidFill>
+                  <a:srgbClr val="263044"/>
+                </a:solidFill>
+              </a:rPr>
+              <a:t>(</a:t>
+            </a:r>
+            <a:r>
+              <a:rPr b="1">
+                <a:solidFill>
+                  <a:srgbClr val="0969C3"/>
+                </a:solidFill>
+              </a:rPr>
+              <a:t>true</a:t>
+            </a:r>
+            <a:r>
+              <a:rPr b="0">
+                <a:solidFill>
+                  <a:srgbClr val="263044"/>
+                </a:solidFill>
+              </a:rPr>
+              <a:t>, </a:t>
+            </a:r>
+            <a:r>
+              <a:rPr b="0">
+                <a:solidFill>
                   <a:srgbClr val="7651D4"/>
                 </a:solidFill>
               </a:rPr>
-              <a:t>Decision</a:t>
+              <a:t>AccessDecisionCodes</a:t>
             </a:r>
             <a:r>
               <a:rPr b="0">
@@ -8474,7 +8256,7 @@
                   <a:srgbClr val="7651D4"/>
                 </a:solidFill>
               </a:rPr>
-              <a:t>Allow</a:t>
+              <a:t>Granted</a:t>
             </a:r>
             <a:r>
               <a:rPr b="0">
@@ -8482,11 +8264,158 @@
                   <a:srgbClr val="263044"/>
                 </a:solidFill>
               </a:rPr>
-              <a:t>();</a:t>
+              <a:t>,</a:t>
             </a:r>
           </a:p>
           <a:p xmlns:a="http://schemas.openxmlformats.org/drawingml/2006/main">
             <a:pPr>
+              <a:lnSpc>
+                <a:spcPts val="1300"/>
+              </a:lnSpc>
+              <a:buNone/>
+              <a:defRPr sz="1050">
+                <a:solidFill>
+                  <a:srgbClr val="263044"/>
+                </a:solidFill>
+                <a:latin typeface="Consolas"/>
+                <a:ea typeface="Consolas"/>
+                <a:cs typeface="Consolas"/>
+              </a:defRPr>
+            </a:pPr>
+            <a:r>
+              <a:rPr b="0">
+                <a:solidFill>
+                  <a:srgbClr val="263044"/>
+                </a:solidFill>
+              </a:rPr>
+              <a:t>            </a:t>
+            </a:r>
+            <a:r>
+              <a:rPr b="0">
+                <a:solidFill>
+                  <a:srgbClr val="B45309"/>
+                </a:solidFill>
+              </a:rPr>
+              <a:t>"Atributi i rizik su prihvatljivi."</a:t>
+            </a:r>
+            <a:r>
+              <a:rPr b="0">
+                <a:solidFill>
+                  <a:srgbClr val="263044"/>
+                </a:solidFill>
+              </a:rPr>
+              <a:t>, now + grantReviewInterval)</a:t>
+            </a:r>
+          </a:p>
+          <a:p xmlns:a="http://schemas.openxmlformats.org/drawingml/2006/main">
+            <a:pPr>
+              <a:lnSpc>
+                <a:spcPts val="1300"/>
+              </a:lnSpc>
+              <a:buNone/>
+              <a:defRPr sz="1050">
+                <a:solidFill>
+                  <a:srgbClr val="263044"/>
+                </a:solidFill>
+                <a:latin typeface="Consolas"/>
+                <a:ea typeface="Consolas"/>
+                <a:cs typeface="Consolas"/>
+              </a:defRPr>
+            </a:pPr>
+            <a:r>
+              <a:rPr b="0">
+                <a:solidFill>
+                  <a:srgbClr val="263044"/>
+                </a:solidFill>
+              </a:rPr>
+              <a:t>        : </a:t>
+            </a:r>
+            <a:r>
+              <a:rPr b="1">
+                <a:solidFill>
+                  <a:srgbClr val="0969C3"/>
+                </a:solidFill>
+              </a:rPr>
+              <a:t>new</a:t>
+            </a:r>
+            <a:r>
+              <a:rPr b="0">
+                <a:solidFill>
+                  <a:srgbClr val="263044"/>
+                </a:solidFill>
+              </a:rPr>
+              <a:t>(</a:t>
+            </a:r>
+            <a:r>
+              <a:rPr b="1">
+                <a:solidFill>
+                  <a:srgbClr val="0969C3"/>
+                </a:solidFill>
+              </a:rPr>
+              <a:t>false</a:t>
+            </a:r>
+            <a:r>
+              <a:rPr b="0">
+                <a:solidFill>
+                  <a:srgbClr val="263044"/>
+                </a:solidFill>
+              </a:rPr>
+              <a:t>, denial.</a:t>
+            </a:r>
+            <a:r>
+              <a:rPr b="0">
+                <a:solidFill>
+                  <a:srgbClr val="7651D4"/>
+                </a:solidFill>
+              </a:rPr>
+              <a:t>Code</a:t>
+            </a:r>
+            <a:r>
+              <a:rPr b="0">
+                <a:solidFill>
+                  <a:srgbClr val="263044"/>
+                </a:solidFill>
+              </a:rPr>
+              <a:t>, denial.</a:t>
+            </a:r>
+            <a:r>
+              <a:rPr b="0">
+                <a:solidFill>
+                  <a:srgbClr val="7651D4"/>
+                </a:solidFill>
+              </a:rPr>
+              <a:t>Reason</a:t>
+            </a:r>
+            <a:r>
+              <a:rPr b="0">
+                <a:solidFill>
+                  <a:srgbClr val="263044"/>
+                </a:solidFill>
+              </a:rPr>
+              <a:t>, now + denial.</a:t>
+            </a:r>
+            <a:r>
+              <a:rPr b="0">
+                <a:solidFill>
+                  <a:srgbClr val="7651D4"/>
+                </a:solidFill>
+              </a:rPr>
+              <a:t>ReviewIn</a:t>
+            </a:r>
+            <a:r>
+              <a:rPr b="0">
+                <a:solidFill>
+                  <a:srgbClr val="263044"/>
+                </a:solidFill>
+              </a:rPr>
+              <a:t>);</a:t>
+            </a:r>
+          </a:p>
+          <a:p xmlns:a="http://schemas.openxmlformats.org/drawingml/2006/main">
+            <a:pPr>
+              <a:lnSpc>
+                <a:spcPts val="1300"/>
+              </a:lnSpc>
               <a:buNone/>
               <a:defRPr sz="1050">
                 <a:solidFill>
@@ -8660,7 +8589,7 @@
                 <a:ea typeface="Aptos"/>
                 <a:cs typeface="Aptos"/>
               </a:rPr>
-              <a:t>Улога остаје разумљива, док домен, уређај и активни задатак одређују конкретан контекст.</a:t>
+              <a:t>Свако правило проверава један атрибут; прво одбијање одређује исход и рок следећег прегледа.</a:t>
             </a:r>
           </a:p>
         </p:txBody>
@@ -9145,7 +9074,7 @@
         <p:spPr>
           <a:xfrm xmlns:a="http://schemas.openxmlformats.org/drawingml/2006/main">
             <a:off x="666750" y="2095500"/>
-            <a:ext cx="6858000" cy="2085975"/>
+            <a:ext cx="6858000" cy="2482350"/>
           </a:xfrm>
           <a:prstGeom xmlns:a="http://schemas.openxmlformats.org/drawingml/2006/main" prst="roundRect">
             <a:avLst>
@@ -9327,7 +9256,7 @@
           <a:p xmlns:a="http://schemas.openxmlformats.org/drawingml/2006/main">
             <a:pPr algn="r">
               <a:lnSpc>
-                <a:spcPct val="100000"/>
+                <a:spcPts val="1300"/>
               </a:lnSpc>
               <a:buNone/>
               <a:defRPr sz="975" b="0">
@@ -9354,7 +9283,7 @@
           <a:p xmlns:a="http://schemas.openxmlformats.org/drawingml/2006/main">
             <a:pPr algn="r">
               <a:lnSpc>
-                <a:spcPct val="100000"/>
+                <a:spcPts val="1300"/>
               </a:lnSpc>
               <a:buNone/>
               <a:defRPr sz="975" b="0">
@@ -9381,7 +9310,7 @@
           <a:p xmlns:a="http://schemas.openxmlformats.org/drawingml/2006/main">
             <a:pPr algn="r">
               <a:lnSpc>
-                <a:spcPct val="100000"/>
+                <a:spcPts val="1300"/>
               </a:lnSpc>
               <a:buNone/>
               <a:defRPr sz="975" b="0">
@@ -9408,7 +9337,7 @@
           <a:p xmlns:a="http://schemas.openxmlformats.org/drawingml/2006/main">
             <a:pPr algn="r">
               <a:lnSpc>
-                <a:spcPct val="100000"/>
+                <a:spcPts val="1300"/>
               </a:lnSpc>
               <a:buNone/>
               <a:defRPr sz="975" b="0">
@@ -9435,7 +9364,7 @@
           <a:p xmlns:a="http://schemas.openxmlformats.org/drawingml/2006/main">
             <a:pPr algn="r">
               <a:lnSpc>
-                <a:spcPct val="100000"/>
+                <a:spcPts val="1300"/>
               </a:lnSpc>
               <a:buNone/>
               <a:defRPr sz="975" b="0">
@@ -9462,7 +9391,7 @@
           <a:p xmlns:a="http://schemas.openxmlformats.org/drawingml/2006/main">
             <a:pPr algn="r">
               <a:lnSpc>
-                <a:spcPct val="100000"/>
+                <a:spcPts val="1300"/>
               </a:lnSpc>
               <a:buNone/>
               <a:defRPr sz="975" b="0">
@@ -9489,7 +9418,7 @@
           <a:p xmlns:a="http://schemas.openxmlformats.org/drawingml/2006/main">
             <a:pPr algn="r">
               <a:lnSpc>
-                <a:spcPct val="100000"/>
+                <a:spcPts val="1300"/>
               </a:lnSpc>
               <a:buNone/>
               <a:defRPr sz="975" b="0">
@@ -9516,7 +9445,7 @@
           <a:p xmlns:a="http://schemas.openxmlformats.org/drawingml/2006/main">
             <a:pPr algn="r">
               <a:lnSpc>
-                <a:spcPct val="100000"/>
+                <a:spcPts val="1300"/>
               </a:lnSpc>
               <a:buNone/>
               <a:defRPr sz="975" b="0">
@@ -9543,7 +9472,7 @@
           <a:p xmlns:a="http://schemas.openxmlformats.org/drawingml/2006/main">
             <a:pPr algn="r">
               <a:lnSpc>
-                <a:spcPct val="100000"/>
+                <a:spcPts val="1300"/>
               </a:lnSpc>
               <a:buNone/>
               <a:defRPr sz="975" b="0">
@@ -9567,46 +9496,15 @@
               <a:t>9</a:t>
             </a:r>
           </a:p>
-        </p:txBody>
-      </p:sp>
-      <p:sp>
-        <p:nvSpPr>
-          <p:cNvPr id="12" name="Rectangle 11">
-            <a:extLst xmlns:a="http://schemas.openxmlformats.org/drawingml/2006/main">
-              <a:ext uri="{FF2B5EF4-FFF2-40B4-BE49-F238E27FC236}">
-                <a16:creationId xmlns:a16="http://schemas.microsoft.com/office/drawing/2014/main" id="{D0C2B0C3-BE4A-47AB-B6D2-C4F9306B3E63}"/>
-              </a:ext>
-            </a:extLst>
-          </p:cNvPr>
-          <p:cNvSpPr>
-            <a:spLocks xmlns:a="http://schemas.openxmlformats.org/drawingml/2006/main" noGrp="1"/>
-          </p:cNvSpPr>
-          <p:nvPr/>
-        </p:nvSpPr>
-        <p:spPr>
-          <a:xfrm xmlns:a="http://schemas.openxmlformats.org/drawingml/2006/main">
-            <a:off x="1200150" y="2571750"/>
-            <a:ext cx="6153150" cy="3028950"/>
-          </a:xfrm>
-          <a:prstGeom xmlns:a="http://schemas.openxmlformats.org/drawingml/2006/main" prst="rect">
-            <a:avLst/>
-          </a:prstGeom>
-          <a:noFill xmlns:a="http://schemas.openxmlformats.org/drawingml/2006/main"/>
-          <a:ln xmlns:a="http://schemas.openxmlformats.org/drawingml/2006/main" w="0">
-            <a:noFill/>
-          </a:ln>
-        </p:spPr>
-        <p:txBody>
-          <a:bodyPr xmlns:a="http://schemas.openxmlformats.org/drawingml/2006/main" wrap="square" lIns="0" tIns="0" rIns="0" bIns="0" anchor="t">
-            <a:normAutofit/>
-          </a:bodyPr>
-          <a:lstStyle xmlns:a="http://schemas.openxmlformats.org/drawingml/2006/main"/>
-          <a:p xmlns:a="http://schemas.openxmlformats.org/drawingml/2006/main">
-            <a:pPr>
-              <a:buNone/>
-              <a:defRPr sz="1050">
-                <a:solidFill>
-                  <a:srgbClr val="263044"/>
+          <a:p xmlns:a="http://schemas.openxmlformats.org/drawingml/2006/main">
+            <a:pPr algn="r">
+              <a:lnSpc>
+                <a:spcPts val="1300"/>
+              </a:lnSpc>
+              <a:buNone/>
+              <a:defRPr sz="975" b="0">
+                <a:solidFill>
+                  <a:srgbClr val="8792A6"/>
                 </a:solidFill>
                 <a:latin typeface="Consolas"/>
                 <a:ea typeface="Consolas"/>
@@ -9614,105 +9512,26 @@
               </a:defRPr>
             </a:pPr>
             <a:r>
-              <a:rPr b="0">
-                <a:solidFill>
-                  <a:srgbClr val="263044"/>
-                </a:solidFill>
-              </a:rPr>
-              <a:t>[</a:t>
-            </a:r>
-            <a:r>
-              <a:rPr b="0">
-                <a:solidFill>
-                  <a:srgbClr val="7651D4"/>
-                </a:solidFill>
-              </a:rPr>
-              <a:t>Theory</a:t>
-            </a:r>
-            <a:r>
-              <a:rPr b="0">
-                <a:solidFill>
-                  <a:srgbClr val="263044"/>
-                </a:solidFill>
-              </a:rPr>
-              <a:t>]</a:t>
-            </a:r>
-          </a:p>
-          <a:p xmlns:a="http://schemas.openxmlformats.org/drawingml/2006/main">
-            <a:pPr>
-              <a:buNone/>
-              <a:defRPr sz="1050">
-                <a:solidFill>
-                  <a:srgbClr val="263044"/>
+              <a:rPr sz="975" b="0">
+                <a:solidFill>
+                  <a:srgbClr val="8792A6"/>
                 </a:solidFill>
                 <a:latin typeface="Consolas"/>
                 <a:ea typeface="Consolas"/>
                 <a:cs typeface="Consolas"/>
-              </a:defRPr>
-            </a:pPr>
-            <a:r>
-              <a:rPr b="0">
-                <a:solidFill>
-                  <a:srgbClr val="263044"/>
-                </a:solidFill>
-              </a:rPr>
-              <a:t>[</a:t>
-            </a:r>
-            <a:r>
-              <a:rPr b="0">
-                <a:solidFill>
-                  <a:srgbClr val="7651D4"/>
-                </a:solidFill>
-              </a:rPr>
-              <a:t>InlineData</a:t>
-            </a:r>
-            <a:r>
-              <a:rPr b="0">
-                <a:solidFill>
-                  <a:srgbClr val="263044"/>
-                </a:solidFill>
-              </a:rPr>
-              <a:t>(</a:t>
-            </a:r>
-            <a:r>
-              <a:rPr b="1">
-                <a:solidFill>
-                  <a:srgbClr val="0969C3"/>
-                </a:solidFill>
-              </a:rPr>
-              <a:t>false</a:t>
-            </a:r>
-            <a:r>
-              <a:rPr b="0">
-                <a:solidFill>
-                  <a:srgbClr val="263044"/>
-                </a:solidFill>
-              </a:rPr>
-              <a:t>, </a:t>
-            </a:r>
-            <a:r>
-              <a:rPr b="0">
-                <a:solidFill>
-                  <a:srgbClr val="B45309"/>
-                </a:solidFill>
-              </a:rPr>
-              <a:t>"device"</a:t>
-            </a:r>
-            <a:r>
-              <a:rPr b="0">
-                <a:solidFill>
-                  <a:srgbClr val="263044"/>
-                </a:solidFill>
-              </a:rPr>
-              <a:t>)]</a:t>
-            </a:r>
-          </a:p>
-          <a:p xmlns:a="http://schemas.openxmlformats.org/drawingml/2006/main">
-            <a:pPr>
-              <a:buNone/>
-              <a:defRPr sz="1050">
-                <a:solidFill>
-                  <a:srgbClr val="263044"/>
+              </a:rPr>
+              <a:t>10</a:t>
+            </a:r>
+          </a:p>
+          <a:p xmlns:a="http://schemas.openxmlformats.org/drawingml/2006/main">
+            <a:pPr algn="r">
+              <a:lnSpc>
+                <a:spcPts val="1300"/>
+              </a:lnSpc>
+              <a:buNone/>
+              <a:defRPr sz="975" b="0">
+                <a:solidFill>
+                  <a:srgbClr val="8792A6"/>
                 </a:solidFill>
                 <a:latin typeface="Consolas"/>
                 <a:ea typeface="Consolas"/>
@@ -9720,157 +9539,56 @@
               </a:defRPr>
             </a:pPr>
             <a:r>
-              <a:rPr b="0">
-                <a:solidFill>
-                  <a:srgbClr val="263044"/>
-                </a:solidFill>
-              </a:rPr>
-              <a:t>[</a:t>
-            </a:r>
-            <a:r>
-              <a:rPr b="0">
-                <a:solidFill>
-                  <a:srgbClr val="7651D4"/>
-                </a:solidFill>
-              </a:rPr>
-              <a:t>InlineData</a:t>
-            </a:r>
-            <a:r>
-              <a:rPr b="0">
-                <a:solidFill>
-                  <a:srgbClr val="263044"/>
-                </a:solidFill>
-              </a:rPr>
-              <a:t>(</a:t>
-            </a:r>
-            <a:r>
-              <a:rPr b="1">
-                <a:solidFill>
-                  <a:srgbClr val="0969C3"/>
-                </a:solidFill>
-              </a:rPr>
-              <a:t>true</a:t>
-            </a:r>
-            <a:r>
-              <a:rPr b="0">
-                <a:solidFill>
-                  <a:srgbClr val="263044"/>
-                </a:solidFill>
-              </a:rPr>
-              <a:t>, </a:t>
-            </a:r>
-            <a:r>
-              <a:rPr b="0">
-                <a:solidFill>
-                  <a:srgbClr val="B45309"/>
-                </a:solidFill>
-              </a:rPr>
-              <a:t>"assignment"</a:t>
-            </a:r>
-            <a:r>
-              <a:rPr b="0">
-                <a:solidFill>
-                  <a:srgbClr val="263044"/>
-                </a:solidFill>
-              </a:rPr>
-              <a:t>)]</a:t>
-            </a:r>
-          </a:p>
-          <a:p xmlns:a="http://schemas.openxmlformats.org/drawingml/2006/main">
-            <a:pPr>
-              <a:buNone/>
-              <a:defRPr sz="1050">
-                <a:solidFill>
-                  <a:srgbClr val="263044"/>
+              <a:rPr sz="975" b="0">
+                <a:solidFill>
+                  <a:srgbClr val="8792A6"/>
                 </a:solidFill>
                 <a:latin typeface="Consolas"/>
                 <a:ea typeface="Consolas"/>
                 <a:cs typeface="Consolas"/>
-              </a:defRPr>
-            </a:pPr>
-            <a:r>
-              <a:rPr b="1">
-                <a:solidFill>
-                  <a:srgbClr val="0969C3"/>
-                </a:solidFill>
-              </a:rPr>
-              <a:t>public</a:t>
-            </a:r>
-            <a:r>
-              <a:rPr b="0">
-                <a:solidFill>
-                  <a:srgbClr val="263044"/>
-                </a:solidFill>
-              </a:rPr>
-              <a:t> </a:t>
-            </a:r>
-            <a:r>
-              <a:rPr b="1">
-                <a:solidFill>
-                  <a:srgbClr val="0969C3"/>
-                </a:solidFill>
-              </a:rPr>
-              <a:t>void</a:t>
-            </a:r>
-            <a:r>
-              <a:rPr b="0">
-                <a:solidFill>
-                  <a:srgbClr val="263044"/>
-                </a:solidFill>
-              </a:rPr>
-              <a:t> </a:t>
-            </a:r>
-            <a:r>
-              <a:rPr b="0">
-                <a:solidFill>
-                  <a:srgbClr val="7651D4"/>
-                </a:solidFill>
-              </a:rPr>
-              <a:t>Context_changes_the_same_roles_decision</a:t>
-            </a:r>
-            <a:r>
-              <a:rPr b="0">
-                <a:solidFill>
-                  <a:srgbClr val="263044"/>
-                </a:solidFill>
-              </a:rPr>
-              <a:t>(</a:t>
-            </a:r>
-            <a:r>
-              <a:rPr b="1">
-                <a:solidFill>
-                  <a:srgbClr val="0969C3"/>
-                </a:solidFill>
-              </a:rPr>
-              <a:t>bool</a:t>
-            </a:r>
-            <a:r>
-              <a:rPr b="0">
-                <a:solidFill>
-                  <a:srgbClr val="263044"/>
-                </a:solidFill>
-              </a:rPr>
-              <a:t> managed, </a:t>
-            </a:r>
-            <a:r>
-              <a:rPr b="1">
-                <a:solidFill>
-                  <a:srgbClr val="0969C3"/>
-                </a:solidFill>
-              </a:rPr>
-              <a:t>string</a:t>
-            </a:r>
-            <a:r>
-              <a:rPr b="0">
-                <a:solidFill>
-                  <a:srgbClr val="263044"/>
-                </a:solidFill>
-              </a:rPr>
-              <a:t> reason)</a:t>
-            </a:r>
-          </a:p>
+              </a:rPr>
+              <a:t>11</a:t>
+            </a:r>
+          </a:p>
+        </p:txBody>
+      </p:sp>
+      <p:sp>
+        <p:nvSpPr>
+          <p:cNvPr id="12" name="Rectangle 11">
+            <a:extLst xmlns:a="http://schemas.openxmlformats.org/drawingml/2006/main">
+              <a:ext uri="{FF2B5EF4-FFF2-40B4-BE49-F238E27FC236}">
+                <a16:creationId xmlns:a16="http://schemas.microsoft.com/office/drawing/2014/main" id="{D0C2B0C3-BE4A-47AB-B6D2-C4F9306B3E63}"/>
+              </a:ext>
+            </a:extLst>
+          </p:cNvPr>
+          <p:cNvSpPr>
+            <a:spLocks xmlns:a="http://schemas.openxmlformats.org/drawingml/2006/main" noGrp="1"/>
+          </p:cNvSpPr>
+          <p:nvPr/>
+        </p:nvSpPr>
+        <p:spPr>
+          <a:xfrm xmlns:a="http://schemas.openxmlformats.org/drawingml/2006/main">
+            <a:off x="1200150" y="2571750"/>
+            <a:ext cx="6153150" cy="3028950"/>
+          </a:xfrm>
+          <a:prstGeom xmlns:a="http://schemas.openxmlformats.org/drawingml/2006/main" prst="rect">
+            <a:avLst/>
+          </a:prstGeom>
+          <a:noFill xmlns:a="http://schemas.openxmlformats.org/drawingml/2006/main"/>
+          <a:ln xmlns:a="http://schemas.openxmlformats.org/drawingml/2006/main" w="0">
+            <a:noFill/>
+          </a:ln>
+        </p:spPr>
+        <p:txBody>
+          <a:bodyPr xmlns:a="http://schemas.openxmlformats.org/drawingml/2006/main" wrap="square" lIns="0" tIns="0" rIns="0" bIns="0" anchor="t">
+            <a:normAutofit/>
+          </a:bodyPr>
+          <a:lstStyle xmlns:a="http://schemas.openxmlformats.org/drawingml/2006/main"/>
           <a:p xmlns:a="http://schemas.openxmlformats.org/drawingml/2006/main">
             <a:pPr>
+              <a:lnSpc>
+                <a:spcPts val="1300"/>
+              </a:lnSpc>
               <a:buNone/>
               <a:defRPr sz="1050">
                 <a:solidFill>
@@ -9887,11 +9605,30 @@
                   <a:srgbClr val="263044"/>
                 </a:solidFill>
               </a:rPr>
-              <a:t>{</a:t>
+              <a:t>[</a:t>
+            </a:r>
+            <a:r>
+              <a:rPr b="0">
+                <a:solidFill>
+                  <a:srgbClr val="7651D4"/>
+                </a:solidFill>
+              </a:rPr>
+              <a:t>Test</a:t>
+            </a:r>
+            <a:r>
+              <a:rPr b="0">
+                <a:solidFill>
+                  <a:srgbClr val="263044"/>
+                </a:solidFill>
+              </a:rPr>
+              <a:t>]</a:t>
             </a:r>
           </a:p>
           <a:p xmlns:a="http://schemas.openxmlformats.org/drawingml/2006/main">
             <a:pPr>
+              <a:lnSpc>
+                <a:spcPts val="1300"/>
+              </a:lnSpc>
               <a:buNone/>
               <a:defRPr sz="1050">
                 <a:solidFill>
@@ -9903,12 +9640,20 @@
               </a:defRPr>
             </a:pPr>
             <a:r>
+              <a:rPr b="1">
+                <a:solidFill>
+                  <a:srgbClr val="0969C3"/>
+                </a:solidFill>
+              </a:rPr>
+              <a:t>public</a:t>
+            </a:r>
+            <a:r>
               <a:rPr b="0">
                 <a:solidFill>
                   <a:srgbClr val="263044"/>
                 </a:solidFill>
               </a:rPr>
-              <a:t>    </a:t>
+              <a:t> </a:t>
             </a:r>
             <a:r>
               <a:rPr b="1">
@@ -9916,7 +9661,7 @@
                   <a:srgbClr val="0969C3"/>
                 </a:solidFill>
               </a:rPr>
-              <a:t>var</a:t>
+              <a:t>void</a:t>
             </a:r>
             <a:r>
               <a:rPr b="0">
@@ -9924,7 +9669,7 @@
                   <a:srgbClr val="263044"/>
                 </a:solidFill>
               </a:rPr>
-              <a:t> ctx = </a:t>
+              <a:t> </a:t>
             </a:r>
             <a:r>
               <a:rPr b="0">
@@ -9932,7 +9677,7 @@
                   <a:srgbClr val="7651D4"/>
                 </a:solidFill>
               </a:rPr>
-              <a:t>Context</a:t>
+              <a:t>Evaluate_WhenRiskIsTooHigh_AsksForEarlyReevaluation</a:t>
             </a:r>
             <a:r>
               <a:rPr b="0">
@@ -9940,43 +9685,14 @@
                   <a:srgbClr val="263044"/>
                 </a:solidFill>
               </a:rPr>
-              <a:t>.</a:t>
-            </a:r>
-            <a:r>
-              <a:rPr b="0">
-                <a:solidFill>
-                  <a:srgbClr val="7651D4"/>
-                </a:solidFill>
-              </a:rPr>
-              <a:t>For</a:t>
-            </a:r>
-            <a:r>
-              <a:rPr b="0">
-                <a:solidFill>
-                  <a:srgbClr val="263044"/>
-                </a:solidFill>
-              </a:rPr>
-              <a:t>(managed, assigned: </a:t>
-            </a:r>
-            <a:r>
-              <a:rPr b="1">
-                <a:solidFill>
-                  <a:srgbClr val="0969C3"/>
-                </a:solidFill>
-              </a:rPr>
-              <a:t>false</a:t>
-            </a:r>
-            <a:r>
-              <a:rPr b="0">
-                <a:solidFill>
-                  <a:srgbClr val="263044"/>
-                </a:solidFill>
-              </a:rPr>
-              <a:t>);</a:t>
+              <a:t>()</a:t>
             </a:r>
           </a:p>
           <a:p xmlns:a="http://schemas.openxmlformats.org/drawingml/2006/main">
             <a:pPr>
+              <a:lnSpc>
+                <a:spcPts val="1300"/>
+              </a:lnSpc>
               <a:buNone/>
               <a:defRPr sz="1050">
                 <a:solidFill>
@@ -9993,43 +9709,14 @@
                   <a:srgbClr val="263044"/>
                 </a:solidFill>
               </a:rPr>
-              <a:t>    </a:t>
-            </a:r>
-            <a:r>
-              <a:rPr b="1">
-                <a:solidFill>
-                  <a:srgbClr val="0969C3"/>
-                </a:solidFill>
-              </a:rPr>
-              <a:t>var</a:t>
-            </a:r>
-            <a:r>
-              <a:rPr b="0">
-                <a:solidFill>
-                  <a:srgbClr val="263044"/>
-                </a:solidFill>
-              </a:rPr>
-              <a:t> result = policy.</a:t>
-            </a:r>
-            <a:r>
-              <a:rPr b="0">
-                <a:solidFill>
-                  <a:srgbClr val="7651D4"/>
-                </a:solidFill>
-              </a:rPr>
-              <a:t>CanApprove</a:t>
-            </a:r>
-            <a:r>
-              <a:rPr b="0">
-                <a:solidFill>
-                  <a:srgbClr val="263044"/>
-                </a:solidFill>
-              </a:rPr>
-              <a:t>(user, report, ctx);</a:t>
+              <a:t>{</a:t>
             </a:r>
           </a:p>
           <a:p xmlns:a="http://schemas.openxmlformats.org/drawingml/2006/main">
             <a:pPr>
+              <a:lnSpc>
+                <a:spcPts val="1300"/>
+              </a:lnSpc>
               <a:buNone/>
               <a:defRPr sz="1050">
                 <a:solidFill>
@@ -10046,15 +9733,31 @@
                   <a:srgbClr val="263044"/>
                 </a:solidFill>
               </a:rPr>
-              <a:t>    result.</a:t>
+              <a:t>    </a:t>
+            </a:r>
+            <a:r>
+              <a:rPr b="1">
+                <a:solidFill>
+                  <a:srgbClr val="0969C3"/>
+                </a:solidFill>
+              </a:rPr>
+              <a:t>var</a:t>
             </a:r>
             <a:r>
               <a:rPr b="0">
                 <a:solidFill>
+                  <a:srgbClr val="263044"/>
+                </a:solidFill>
+              </a:rPr>
+              <a:t> decision = _policy.</a:t>
+            </a:r>
+            <a:r>
+              <a:rPr b="0">
+                <a:solidFill>
                   <a:srgbClr val="7651D4"/>
                 </a:solidFill>
               </a:rPr>
-              <a:t>Reason</a:t>
+              <a:t>Evaluate</a:t>
             </a:r>
             <a:r>
               <a:rPr b="0">
@@ -10062,6 +9765,22 @@
                   <a:srgbClr val="263044"/>
                 </a:solidFill>
               </a:rPr>
+              <a:t>(</a:t>
+            </a:r>
+            <a:r>
+              <a:rPr b="0">
+                <a:solidFill>
+                  <a:srgbClr val="7651D4"/>
+                </a:solidFill>
+              </a:rPr>
+              <a:t>Contexts</a:t>
+            </a:r>
+            <a:r>
+              <a:rPr b="0">
+                <a:solidFill>
+                  <a:srgbClr val="263044"/>
+                </a:solidFill>
+              </a:rPr>
               <a:t>.</a:t>
             </a:r>
             <a:r>
@@ -10070,7 +9789,7 @@
                   <a:srgbClr val="7651D4"/>
                 </a:solidFill>
               </a:rPr>
-              <a:t>Should</a:t>
+              <a:t>Safe</a:t>
             </a:r>
             <a:r>
               <a:rPr b="0">
@@ -10078,15 +9797,31 @@
                   <a:srgbClr val="263044"/>
                 </a:solidFill>
               </a:rPr>
-              <a:t>().</a:t>
+              <a:t> </a:t>
+            </a:r>
+            <a:r>
+              <a:rPr b="1">
+                <a:solidFill>
+                  <a:srgbClr val="0969C3"/>
+                </a:solidFill>
+              </a:rPr>
+              <a:t>with</a:t>
             </a:r>
             <a:r>
               <a:rPr b="0">
                 <a:solidFill>
+                  <a:srgbClr val="263044"/>
+                </a:solidFill>
+              </a:rPr>
+              <a:t> { </a:t>
+            </a:r>
+            <a:r>
+              <a:rPr b="0">
+                <a:solidFill>
                   <a:srgbClr val="7651D4"/>
                 </a:solidFill>
               </a:rPr>
-              <a:t>Be</a:t>
+              <a:t>RiskScore</a:t>
             </a:r>
             <a:r>
               <a:rPr b="0">
@@ -10094,11 +9829,478 @@
                   <a:srgbClr val="263044"/>
                 </a:solidFill>
               </a:rPr>
-              <a:t>(reason);</a:t>
+              <a:t> = </a:t>
+            </a:r>
+            <a:r>
+              <a:rPr b="0">
+                <a:solidFill>
+                  <a:srgbClr val="B86A09"/>
+                </a:solidFill>
+              </a:rPr>
+              <a:t>85</a:t>
+            </a:r>
+            <a:r>
+              <a:rPr b="0">
+                <a:solidFill>
+                  <a:srgbClr val="263044"/>
+                </a:solidFill>
+              </a:rPr>
+              <a:t> }, </a:t>
+            </a:r>
+            <a:r>
+              <a:rPr b="0">
+                <a:solidFill>
+                  <a:srgbClr val="7651D4"/>
+                </a:solidFill>
+              </a:rPr>
+              <a:t>Now</a:t>
+            </a:r>
+            <a:r>
+              <a:rPr b="0">
+                <a:solidFill>
+                  <a:srgbClr val="263044"/>
+                </a:solidFill>
+              </a:rPr>
+              <a:t>);</a:t>
             </a:r>
           </a:p>
           <a:p xmlns:a="http://schemas.openxmlformats.org/drawingml/2006/main">
             <a:pPr>
+              <a:lnSpc>
+                <a:spcPts val="1300"/>
+              </a:lnSpc>
+              <a:buNone/>
+              <a:defRPr sz="1050">
+                <a:solidFill>
+                  <a:srgbClr val="263044"/>
+                </a:solidFill>
+                <a:latin typeface="Consolas"/>
+                <a:ea typeface="Consolas"/>
+                <a:cs typeface="Consolas"/>
+              </a:defRPr>
+            </a:pPr>
+            <a:r>
+              <a:rPr b="0">
+                <a:solidFill>
+                  <a:srgbClr val="263044"/>
+                </a:solidFill>
+              </a:rPr>
+              <a:t> </a:t>
+            </a:r>
+          </a:p>
+          <a:p xmlns:a="http://schemas.openxmlformats.org/drawingml/2006/main">
+            <a:pPr>
+              <a:lnSpc>
+                <a:spcPts val="1300"/>
+              </a:lnSpc>
+              <a:buNone/>
+              <a:defRPr sz="1050">
+                <a:solidFill>
+                  <a:srgbClr val="263044"/>
+                </a:solidFill>
+                <a:latin typeface="Consolas"/>
+                <a:ea typeface="Consolas"/>
+                <a:cs typeface="Consolas"/>
+              </a:defRPr>
+            </a:pPr>
+            <a:r>
+              <a:rPr b="0">
+                <a:solidFill>
+                  <a:srgbClr val="263044"/>
+                </a:solidFill>
+              </a:rPr>
+              <a:t>    </a:t>
+            </a:r>
+            <a:r>
+              <a:rPr b="1">
+                <a:solidFill>
+                  <a:srgbClr val="0969C3"/>
+                </a:solidFill>
+              </a:rPr>
+              <a:t>using</a:t>
+            </a:r>
+            <a:r>
+              <a:rPr b="0">
+                <a:solidFill>
+                  <a:srgbClr val="263044"/>
+                </a:solidFill>
+              </a:rPr>
+              <a:t> (</a:t>
+            </a:r>
+            <a:r>
+              <a:rPr b="0">
+                <a:solidFill>
+                  <a:srgbClr val="7651D4"/>
+                </a:solidFill>
+              </a:rPr>
+              <a:t>Assert</a:t>
+            </a:r>
+            <a:r>
+              <a:rPr b="0">
+                <a:solidFill>
+                  <a:srgbClr val="263044"/>
+                </a:solidFill>
+              </a:rPr>
+              <a:t>.</a:t>
+            </a:r>
+            <a:r>
+              <a:rPr b="0">
+                <a:solidFill>
+                  <a:srgbClr val="7651D4"/>
+                </a:solidFill>
+              </a:rPr>
+              <a:t>EnterMultipleScope</a:t>
+            </a:r>
+            <a:r>
+              <a:rPr b="0">
+                <a:solidFill>
+                  <a:srgbClr val="263044"/>
+                </a:solidFill>
+              </a:rPr>
+              <a:t>())</a:t>
+            </a:r>
+          </a:p>
+          <a:p xmlns:a="http://schemas.openxmlformats.org/drawingml/2006/main">
+            <a:pPr>
+              <a:lnSpc>
+                <a:spcPts val="1300"/>
+              </a:lnSpc>
+              <a:buNone/>
+              <a:defRPr sz="1050">
+                <a:solidFill>
+                  <a:srgbClr val="263044"/>
+                </a:solidFill>
+                <a:latin typeface="Consolas"/>
+                <a:ea typeface="Consolas"/>
+                <a:cs typeface="Consolas"/>
+              </a:defRPr>
+            </a:pPr>
+            <a:r>
+              <a:rPr b="0">
+                <a:solidFill>
+                  <a:srgbClr val="263044"/>
+                </a:solidFill>
+              </a:rPr>
+              <a:t>    {</a:t>
+            </a:r>
+          </a:p>
+          <a:p xmlns:a="http://schemas.openxmlformats.org/drawingml/2006/main">
+            <a:pPr>
+              <a:lnSpc>
+                <a:spcPts val="1300"/>
+              </a:lnSpc>
+              <a:buNone/>
+              <a:defRPr sz="1050">
+                <a:solidFill>
+                  <a:srgbClr val="263044"/>
+                </a:solidFill>
+                <a:latin typeface="Consolas"/>
+                <a:ea typeface="Consolas"/>
+                <a:cs typeface="Consolas"/>
+              </a:defRPr>
+            </a:pPr>
+            <a:r>
+              <a:rPr b="0">
+                <a:solidFill>
+                  <a:srgbClr val="263044"/>
+                </a:solidFill>
+              </a:rPr>
+              <a:t>        </a:t>
+            </a:r>
+            <a:r>
+              <a:rPr b="0">
+                <a:solidFill>
+                  <a:srgbClr val="7651D4"/>
+                </a:solidFill>
+              </a:rPr>
+              <a:t>Assert</a:t>
+            </a:r>
+            <a:r>
+              <a:rPr b="0">
+                <a:solidFill>
+                  <a:srgbClr val="263044"/>
+                </a:solidFill>
+              </a:rPr>
+              <a:t>.</a:t>
+            </a:r>
+            <a:r>
+              <a:rPr b="0">
+                <a:solidFill>
+                  <a:srgbClr val="7651D4"/>
+                </a:solidFill>
+              </a:rPr>
+              <a:t>That</a:t>
+            </a:r>
+            <a:r>
+              <a:rPr b="0">
+                <a:solidFill>
+                  <a:srgbClr val="263044"/>
+                </a:solidFill>
+              </a:rPr>
+              <a:t>(decision.</a:t>
+            </a:r>
+            <a:r>
+              <a:rPr b="0">
+                <a:solidFill>
+                  <a:srgbClr val="7651D4"/>
+                </a:solidFill>
+              </a:rPr>
+              <a:t>Code</a:t>
+            </a:r>
+            <a:r>
+              <a:rPr b="0">
+                <a:solidFill>
+                  <a:srgbClr val="263044"/>
+                </a:solidFill>
+              </a:rPr>
+              <a:t>, </a:t>
+            </a:r>
+            <a:r>
+              <a:rPr b="0">
+                <a:solidFill>
+                  <a:srgbClr val="7651D4"/>
+                </a:solidFill>
+              </a:rPr>
+              <a:t>Is</a:t>
+            </a:r>
+            <a:r>
+              <a:rPr b="0">
+                <a:solidFill>
+                  <a:srgbClr val="263044"/>
+                </a:solidFill>
+              </a:rPr>
+              <a:t>.</a:t>
+            </a:r>
+            <a:r>
+              <a:rPr b="0">
+                <a:solidFill>
+                  <a:srgbClr val="7651D4"/>
+                </a:solidFill>
+              </a:rPr>
+              <a:t>EqualTo</a:t>
+            </a:r>
+            <a:r>
+              <a:rPr b="0">
+                <a:solidFill>
+                  <a:srgbClr val="263044"/>
+                </a:solidFill>
+              </a:rPr>
+              <a:t>(</a:t>
+            </a:r>
+            <a:r>
+              <a:rPr b="0">
+                <a:solidFill>
+                  <a:srgbClr val="7651D4"/>
+                </a:solidFill>
+              </a:rPr>
+              <a:t>AccessDecisionCodes</a:t>
+            </a:r>
+            <a:r>
+              <a:rPr b="0">
+                <a:solidFill>
+                  <a:srgbClr val="263044"/>
+                </a:solidFill>
+              </a:rPr>
+              <a:t>.</a:t>
+            </a:r>
+            <a:r>
+              <a:rPr b="0">
+                <a:solidFill>
+                  <a:srgbClr val="7651D4"/>
+                </a:solidFill>
+              </a:rPr>
+              <a:t>RiskTooHigh</a:t>
+            </a:r>
+            <a:r>
+              <a:rPr b="0">
+                <a:solidFill>
+                  <a:srgbClr val="263044"/>
+                </a:solidFill>
+              </a:rPr>
+              <a:t>));</a:t>
+            </a:r>
+          </a:p>
+          <a:p xmlns:a="http://schemas.openxmlformats.org/drawingml/2006/main">
+            <a:pPr>
+              <a:lnSpc>
+                <a:spcPts val="1300"/>
+              </a:lnSpc>
+              <a:buNone/>
+              <a:defRPr sz="1050">
+                <a:solidFill>
+                  <a:srgbClr val="263044"/>
+                </a:solidFill>
+                <a:latin typeface="Consolas"/>
+                <a:ea typeface="Consolas"/>
+                <a:cs typeface="Consolas"/>
+              </a:defRPr>
+            </a:pPr>
+            <a:r>
+              <a:rPr b="0">
+                <a:solidFill>
+                  <a:srgbClr val="263044"/>
+                </a:solidFill>
+              </a:rPr>
+              <a:t>        </a:t>
+            </a:r>
+            <a:r>
+              <a:rPr b="0">
+                <a:solidFill>
+                  <a:srgbClr val="7651D4"/>
+                </a:solidFill>
+              </a:rPr>
+              <a:t>Assert</a:t>
+            </a:r>
+            <a:r>
+              <a:rPr b="0">
+                <a:solidFill>
+                  <a:srgbClr val="263044"/>
+                </a:solidFill>
+              </a:rPr>
+              <a:t>.</a:t>
+            </a:r>
+            <a:r>
+              <a:rPr b="0">
+                <a:solidFill>
+                  <a:srgbClr val="7651D4"/>
+                </a:solidFill>
+              </a:rPr>
+              <a:t>That</a:t>
+            </a:r>
+            <a:r>
+              <a:rPr b="0">
+                <a:solidFill>
+                  <a:srgbClr val="263044"/>
+                </a:solidFill>
+              </a:rPr>
+              <a:t>(decision.</a:t>
+            </a:r>
+            <a:r>
+              <a:rPr b="0">
+                <a:solidFill>
+                  <a:srgbClr val="7651D4"/>
+                </a:solidFill>
+              </a:rPr>
+              <a:t>ReviewAfter</a:t>
+            </a:r>
+            <a:r>
+              <a:rPr b="0">
+                <a:solidFill>
+                  <a:srgbClr val="263044"/>
+                </a:solidFill>
+              </a:rPr>
+              <a:t>, </a:t>
+            </a:r>
+            <a:r>
+              <a:rPr b="0">
+                <a:solidFill>
+                  <a:srgbClr val="7651D4"/>
+                </a:solidFill>
+              </a:rPr>
+              <a:t>Is</a:t>
+            </a:r>
+            <a:r>
+              <a:rPr b="0">
+                <a:solidFill>
+                  <a:srgbClr val="263044"/>
+                </a:solidFill>
+              </a:rPr>
+              <a:t>.</a:t>
+            </a:r>
+            <a:r>
+              <a:rPr b="0">
+                <a:solidFill>
+                  <a:srgbClr val="7651D4"/>
+                </a:solidFill>
+              </a:rPr>
+              <a:t>EqualTo</a:t>
+            </a:r>
+            <a:r>
+              <a:rPr b="0">
+                <a:solidFill>
+                  <a:srgbClr val="263044"/>
+                </a:solidFill>
+              </a:rPr>
+              <a:t>(</a:t>
+            </a:r>
+            <a:r>
+              <a:rPr b="0">
+                <a:solidFill>
+                  <a:srgbClr val="7651D4"/>
+                </a:solidFill>
+              </a:rPr>
+              <a:t>Now</a:t>
+            </a:r>
+            <a:r>
+              <a:rPr b="0">
+                <a:solidFill>
+                  <a:srgbClr val="263044"/>
+                </a:solidFill>
+              </a:rPr>
+              <a:t>.</a:t>
+            </a:r>
+            <a:r>
+              <a:rPr b="0">
+                <a:solidFill>
+                  <a:srgbClr val="7651D4"/>
+                </a:solidFill>
+              </a:rPr>
+              <a:t>AddHours</a:t>
+            </a:r>
+            <a:r>
+              <a:rPr b="0">
+                <a:solidFill>
+                  <a:srgbClr val="263044"/>
+                </a:solidFill>
+              </a:rPr>
+              <a:t>(</a:t>
+            </a:r>
+            <a:r>
+              <a:rPr b="0">
+                <a:solidFill>
+                  <a:srgbClr val="B86A09"/>
+                </a:solidFill>
+              </a:rPr>
+              <a:t>1</a:t>
+            </a:r>
+            <a:r>
+              <a:rPr b="0">
+                <a:solidFill>
+                  <a:srgbClr val="263044"/>
+                </a:solidFill>
+              </a:rPr>
+              <a:t>)));</a:t>
+            </a:r>
+          </a:p>
+          <a:p xmlns:a="http://schemas.openxmlformats.org/drawingml/2006/main">
+            <a:pPr>
+              <a:lnSpc>
+                <a:spcPts val="1300"/>
+              </a:lnSpc>
+              <a:buNone/>
+              <a:defRPr sz="1050">
+                <a:solidFill>
+                  <a:srgbClr val="263044"/>
+                </a:solidFill>
+                <a:latin typeface="Consolas"/>
+                <a:ea typeface="Consolas"/>
+                <a:cs typeface="Consolas"/>
+              </a:defRPr>
+            </a:pPr>
+            <a:r>
+              <a:rPr b="0">
+                <a:solidFill>
+                  <a:srgbClr val="263044"/>
+                </a:solidFill>
+              </a:rPr>
+              <a:t>    }</a:t>
+            </a:r>
+          </a:p>
+          <a:p xmlns:a="http://schemas.openxmlformats.org/drawingml/2006/main">
+            <a:pPr>
+              <a:lnSpc>
+                <a:spcPts val="1300"/>
+              </a:lnSpc>
               <a:buNone/>
               <a:defRPr sz="1050">
                 <a:solidFill>
@@ -10272,7 +10474,7 @@
                 <a:ea typeface="Aptos"/>
                 <a:cs typeface="Aptos"/>
               </a:rPr>
-              <a:t>Тестови морају показати који атрибут мења исход и који разлог систем бележи.</a:t>
+              <a:t>Тест мења само процену ризика и показује да се мењају и разлог и рок поновне провере.</a:t>
             </a:r>
           </a:p>
         </p:txBody>
@@ -10939,7 +11141,7 @@
           <a:p xmlns:a="http://schemas.openxmlformats.org/drawingml/2006/main">
             <a:pPr algn="r">
               <a:lnSpc>
-                <a:spcPct val="100000"/>
+                <a:spcPts val="1300"/>
               </a:lnSpc>
               <a:buNone/>
               <a:defRPr sz="1050" b="0">
@@ -10966,7 +11168,7 @@
           <a:p xmlns:a="http://schemas.openxmlformats.org/drawingml/2006/main">
             <a:pPr algn="r">
               <a:lnSpc>
-                <a:spcPct val="100000"/>
+                <a:spcPts val="1300"/>
               </a:lnSpc>
               <a:buNone/>
               <a:defRPr sz="1050" b="0">
@@ -10993,7 +11195,7 @@
           <a:p xmlns:a="http://schemas.openxmlformats.org/drawingml/2006/main">
             <a:pPr algn="r">
               <a:lnSpc>
-                <a:spcPct val="100000"/>
+                <a:spcPts val="1300"/>
               </a:lnSpc>
               <a:buNone/>
               <a:defRPr sz="1050" b="0">
@@ -11020,7 +11222,7 @@
           <a:p xmlns:a="http://schemas.openxmlformats.org/drawingml/2006/main">
             <a:pPr algn="r">
               <a:lnSpc>
-                <a:spcPct val="100000"/>
+                <a:spcPts val="1300"/>
               </a:lnSpc>
               <a:buNone/>
               <a:defRPr sz="1050" b="0">
@@ -11047,7 +11249,7 @@
           <a:p xmlns:a="http://schemas.openxmlformats.org/drawingml/2006/main">
             <a:pPr algn="r">
               <a:lnSpc>
-                <a:spcPct val="100000"/>
+                <a:spcPts val="1300"/>
               </a:lnSpc>
               <a:buNone/>
               <a:defRPr sz="1050" b="0">
@@ -11074,7 +11276,7 @@
           <a:p xmlns:a="http://schemas.openxmlformats.org/drawingml/2006/main">
             <a:pPr algn="r">
               <a:lnSpc>
-                <a:spcPct val="100000"/>
+                <a:spcPts val="1300"/>
               </a:lnSpc>
               <a:buNone/>
               <a:defRPr sz="1050" b="0">
@@ -11101,7 +11303,7 @@
           <a:p xmlns:a="http://schemas.openxmlformats.org/drawingml/2006/main">
             <a:pPr algn="r">
               <a:lnSpc>
-                <a:spcPct val="100000"/>
+                <a:spcPts val="1300"/>
               </a:lnSpc>
               <a:buNone/>
               <a:defRPr sz="1050" b="0">
@@ -11128,7 +11330,7 @@
           <a:p xmlns:a="http://schemas.openxmlformats.org/drawingml/2006/main">
             <a:pPr algn="r">
               <a:lnSpc>
-                <a:spcPct val="100000"/>
+                <a:spcPts val="1300"/>
               </a:lnSpc>
               <a:buNone/>
               <a:defRPr sz="1050" b="0">
@@ -11188,6 +11390,9 @@
           <a:lstStyle xmlns:a="http://schemas.openxmlformats.org/drawingml/2006/main"/>
           <a:p xmlns:a="http://schemas.openxmlformats.org/drawingml/2006/main">
             <a:pPr>
+              <a:lnSpc>
+                <a:spcPts val="1300"/>
+              </a:lnSpc>
               <a:buNone/>
               <a:defRPr sz="1125">
                 <a:solidFill>
@@ -11209,6 +11414,9 @@
           </a:p>
           <a:p xmlns:a="http://schemas.openxmlformats.org/drawingml/2006/main">
             <a:pPr>
+              <a:lnSpc>
+                <a:spcPts val="1300"/>
+              </a:lnSpc>
               <a:buNone/>
               <a:defRPr sz="1125">
                 <a:solidFill>
@@ -11262,6 +11470,9 @@
           </a:p>
           <a:p xmlns:a="http://schemas.openxmlformats.org/drawingml/2006/main">
             <a:pPr>
+              <a:lnSpc>
+                <a:spcPts val="1300"/>
+              </a:lnSpc>
               <a:buNone/>
               <a:defRPr sz="1125">
                 <a:solidFill>
@@ -11315,6 +11526,9 @@
           </a:p>
           <a:p xmlns:a="http://schemas.openxmlformats.org/drawingml/2006/main">
             <a:pPr>
+              <a:lnSpc>
+                <a:spcPts val="1300"/>
+              </a:lnSpc>
               <a:buNone/>
               <a:defRPr sz="1125">
                 <a:solidFill>
@@ -11368,6 +11582,9 @@
           </a:p>
           <a:p xmlns:a="http://schemas.openxmlformats.org/drawingml/2006/main">
             <a:pPr>
+              <a:lnSpc>
+                <a:spcPts val="1300"/>
+              </a:lnSpc>
               <a:buNone/>
               <a:defRPr sz="1125">
                 <a:solidFill>
@@ -11421,6 +11638,9 @@
           </a:p>
           <a:p xmlns:a="http://schemas.openxmlformats.org/drawingml/2006/main">
             <a:pPr>
+              <a:lnSpc>
+                <a:spcPts val="1300"/>
+              </a:lnSpc>
               <a:buNone/>
               <a:defRPr sz="1125">
                 <a:solidFill>
@@ -11474,6 +11694,9 @@
           </a:p>
           <a:p xmlns:a="http://schemas.openxmlformats.org/drawingml/2006/main">
             <a:pPr>
+              <a:lnSpc>
+                <a:spcPts val="1300"/>
+              </a:lnSpc>
               <a:buNone/>
               <a:defRPr sz="1125">
                 <a:solidFill>
@@ -11519,6 +11742,9 @@
           </a:p>
           <a:p xmlns:a="http://schemas.openxmlformats.org/drawingml/2006/main">
             <a:pPr>
+              <a:lnSpc>
+                <a:spcPts val="1300"/>
+              </a:lnSpc>
               <a:buNone/>
               <a:defRPr sz="1125">
                 <a:solidFill>
@@ -20045,7 +20271,7 @@
                 <a:ea typeface="Aptos"/>
                 <a:cs typeface="Aptos"/>
               </a:rPr>
-              <a:t>Атрибути се читају из поузданог, јасног контекста.</a:t>
+              <a:t>Атрибути описују контекст захтева: улогу, уређај, локацију и процењени ризик.</a:t>
             </a:r>
           </a:p>
         </p:txBody>
@@ -20269,7 +20495,7 @@
                 <a:ea typeface="Aptos"/>
                 <a:cs typeface="Aptos"/>
               </a:rPr>
-              <a:t>Атрибутска одлука остаје разумљива само ако је извор сваког атрибута познат и поуздан.</a:t>
+              <a:t>Атрибути се прикупљају из поузданих извора, а не из произвољног захтева клијента.</a:t>
             </a:r>
           </a:p>
         </p:txBody>
@@ -20493,7 +20719,7 @@
                 <a:ea typeface="Aptos"/>
                 <a:cs typeface="Aptos"/>
               </a:rPr>
-              <a:t>Атрибути се прикупљају из ауторитативних извора, а не из произвољног захтева клијента.</a:t>
+              <a:t>Контекст одлуке се бележи довољно да каснији преглед разуме исход.</a:t>
             </a:r>
           </a:p>
         </p:txBody>
@@ -21273,7 +21499,7 @@
                 <a:ea typeface="Aptos"/>
                 <a:cs typeface="Aptos"/>
               </a:rPr>
-              <a:t>Исто стање мора довести до истог резултата политике.</a:t>
+              <a:t>Политика је скуп малих правила; свако правило тумачи један атрибут.</a:t>
             </a:r>
           </a:p>
         </p:txBody>
@@ -21497,7 +21723,7 @@
                 <a:ea typeface="Aptos"/>
                 <a:cs typeface="Aptos"/>
               </a:rPr>
-              <a:t>Правило треба да даје исти резултат за исти снимак контекста, како би могло да се тестира и објасни.</a:t>
+              <a:t>Прво правило које одбије захтев одређује исход и његов разлог.</a:t>
             </a:r>
           </a:p>
         </p:txBody>
@@ -21721,7 +21947,7 @@
                 <a:ea typeface="Aptos"/>
                 <a:cs typeface="Aptos"/>
               </a:rPr>
-              <a:t>Правила треба да буду мала и састављена тако да се конфликт може објаснити.</a:t>
+              <a:t>Иста политика за исти контекст увек даје исти исход, па се може тестирати.</a:t>
             </a:r>
           </a:p>
         </p:txBody>
@@ -22032,7 +22258,7 @@
                 <a:ea typeface="Aptos"/>
                 <a:cs typeface="Aptos"/>
               </a:rPr>
-              <a:t>Коју одлуку не бисте смели да заснивате само на улози и који додатни атрибут јој даје смисао?</a:t>
+              <a:t>Која правила чине вашу политику и којим редом се проверавају?</a:t>
             </a:r>
           </a:p>
         </p:txBody>
@@ -22501,7 +22727,7 @@
                 <a:ea typeface="Aptos"/>
                 <a:cs typeface="Aptos"/>
               </a:rPr>
-              <a:t>Ризик укључује имовину, претњу, контролу и преосталу изложеност.</a:t>
+              <a:t>Процењени ризик је атрибут одлуке: изнад прага приступ се одбија и поред исправне улоге.</a:t>
             </a:r>
           </a:p>
         </p:txBody>
@@ -22725,7 +22951,7 @@
                 <a:ea typeface="Aptos"/>
                 <a:cs typeface="Aptos"/>
               </a:rPr>
-              <a:t>Преглед приступа враћа тим на питање да ли право и даље има пословни разлог, чак и када је некада било правилно додељено.</a:t>
+              <a:t>Преостали ризик има власника који га прихвата на ограничено време.</a:t>
             </a:r>
           </a:p>
         </p:txBody>
@@ -22949,7 +23175,7 @@
                 <a:ea typeface="Aptos"/>
                 <a:cs typeface="Aptos"/>
               </a:rPr>
-              <a:t>Контекст одлуке се бележи довољно да каснији преглед разуме резултат без чувања осетљивих детаља.</a:t>
+              <a:t>Регистар ризика чува сценарио, контролу, власника и датум следећег прегледа.</a:t>
             </a:r>
           </a:p>
         </p:txBody>
@@ -23260,7 +23486,7 @@
                 <a:ea typeface="Aptos"/>
                 <a:cs typeface="Aptos"/>
               </a:rPr>
-              <a:t>Коју одлуку не бисте смели да заснивате само на улози и који додатни атрибут јој даје смисао?</a:t>
+              <a:t>Који праг ризика у вашем систему мења одлуку и ко је одговоран за ту вредност?</a:t>
             </a:r>
           </a:p>
         </p:txBody>
@@ -23729,7 +23955,7 @@
                 <a:ea typeface="Aptos"/>
                 <a:cs typeface="Aptos"/>
               </a:rPr>
-              <a:t>Атрибути се прикупљају из ауторитативних извора, а не из произвољног захтева клијента.</a:t>
+              <a:t>Свака одлука носи рок следећег прегледа; одобрење не важи неограничено.</a:t>
             </a:r>
           </a:p>
         </p:txBody>
@@ -23953,7 +24179,7 @@
                 <a:ea typeface="Aptos"/>
                 <a:cs typeface="Aptos"/>
               </a:rPr>
-              <a:t>Правила треба да буду мала и састављена тако да се конфликт може објаснити.</a:t>
+              <a:t>Одбијање због високог ризика тражи ранију поновну процену него редовно одобрење.</a:t>
             </a:r>
           </a:p>
         </p:txBody>
@@ -24177,7 +24403,7 @@
                 <a:ea typeface="Aptos"/>
                 <a:cs typeface="Aptos"/>
               </a:rPr>
-              <a:t>Контекст одлуке се бележи довољно да каснији преглед разуме резултат без чувања осетљивих детаља.</a:t>
+              <a:t>Преглед приступа оставља запис ко је потврдио право и на основу чега.</a:t>
             </a:r>
           </a:p>
         </p:txBody>
@@ -24488,7 +24714,7 @@
                 <a:ea typeface="Aptos"/>
                 <a:cs typeface="Aptos"/>
               </a:rPr>
-              <a:t>Коју одлуку не бисте смели да заснивате само на улози и који додатни атрибут јој даје смисао?</a:t>
+              <a:t>Колико дуго у вашем систему важи одобрење пре него што се одлука поново провери?</a:t>
             </a:r>
           </a:p>
         </p:txBody>
